--- a/NW-01/slide/emmy_estados_V1.pptx
+++ b/NW-01/slide/emmy_estados_V1.pptx
@@ -4112,6 +4112,36 @@
           </a:p>
         </p:txBody>
       </p:sp>
+      <p:pic>
+        <p:nvPicPr>
+          <p:cNvPr id="4" name="Imagem 3">
+            <a:extLst>
+              <a:ext uri="{FF2B5EF4-FFF2-40B4-BE49-F238E27FC236}">
+                <a16:creationId xmlns:a16="http://schemas.microsoft.com/office/drawing/2014/main" id="{E72C7ED0-AAD3-AC31-5753-97717EFB72CF}"/>
+              </a:ext>
+            </a:extLst>
+          </p:cNvPr>
+          <p:cNvPicPr>
+            <a:picLocks noChangeAspect="1"/>
+          </p:cNvPicPr>
+          <p:nvPr/>
+        </p:nvPicPr>
+        <p:blipFill>
+          <a:blip r:embed="rId5"/>
+          <a:stretch>
+            <a:fillRect/>
+          </a:stretch>
+        </p:blipFill>
+        <p:spPr>
+          <a:xfrm>
+            <a:off x="4742822" y="1554388"/>
+            <a:ext cx="3038530" cy="4271771"/>
+          </a:xfrm>
+          <a:prstGeom prst="rect">
+            <a:avLst/>
+          </a:prstGeom>
+        </p:spPr>
+      </p:pic>
     </p:spTree>
     <p:extLst>
       <p:ext uri="{BB962C8B-B14F-4D97-AF65-F5344CB8AC3E}">
@@ -4531,7 +4561,7 @@
         </p:nvSpPr>
         <p:spPr>
           <a:xfrm>
-            <a:off x="3657600" y="3021204"/>
+            <a:off x="3610302" y="3021204"/>
             <a:ext cx="523875" cy="276225"/>
           </a:xfrm>
           <a:prstGeom prst="rect">
@@ -4590,7 +4620,7 @@
         </p:nvSpPr>
         <p:spPr>
           <a:xfrm>
-            <a:off x="3657600" y="4754754"/>
+            <a:off x="3610302" y="4754754"/>
             <a:ext cx="523875" cy="276225"/>
           </a:xfrm>
           <a:prstGeom prst="rect">
@@ -4635,6 +4665,36 @@
           </a:p>
         </p:txBody>
       </p:sp>
+      <p:pic>
+        <p:nvPicPr>
+          <p:cNvPr id="2" name="Imagem 1">
+            <a:extLst>
+              <a:ext uri="{FF2B5EF4-FFF2-40B4-BE49-F238E27FC236}">
+                <a16:creationId xmlns:a16="http://schemas.microsoft.com/office/drawing/2014/main" id="{97F5AC3E-6E08-6A5A-28C2-AF3580FCC268}"/>
+              </a:ext>
+            </a:extLst>
+          </p:cNvPr>
+          <p:cNvPicPr>
+            <a:picLocks noChangeAspect="1"/>
+          </p:cNvPicPr>
+          <p:nvPr/>
+        </p:nvPicPr>
+        <p:blipFill>
+          <a:blip r:embed="rId5"/>
+          <a:stretch>
+            <a:fillRect/>
+          </a:stretch>
+        </p:blipFill>
+        <p:spPr>
+          <a:xfrm>
+            <a:off x="4679758" y="1554388"/>
+            <a:ext cx="3038530" cy="4271771"/>
+          </a:xfrm>
+          <a:prstGeom prst="rect">
+            <a:avLst/>
+          </a:prstGeom>
+        </p:spPr>
+      </p:pic>
     </p:spTree>
     <p:extLst>
       <p:ext uri="{BB962C8B-B14F-4D97-AF65-F5344CB8AC3E}">
@@ -4742,7 +4802,7 @@
         <p:spPr>
           <a:xfrm>
             <a:off x="1555958" y="547168"/>
-            <a:ext cx="2449004" cy="369332"/>
+            <a:ext cx="6027547" cy="369332"/>
           </a:xfrm>
           <a:prstGeom prst="rect">
             <a:avLst/>
@@ -4770,7 +4830,7 @@
                   <a:sysClr val="windowText" lastClr="000000"/>
                 </a:solidFill>
               </a:rPr>
-              <a:t>Estado Lógico: Falso </a:t>
+              <a:t>Estado Lógico: Quase-verdadeiro tendendo a inconsistente </a:t>
             </a:r>
             <a:endParaRPr lang="en-US" dirty="0">
               <a:ln>
@@ -5054,7 +5114,7 @@
         </p:nvSpPr>
         <p:spPr>
           <a:xfrm>
-            <a:off x="3657600" y="3021204"/>
+            <a:off x="3626068" y="3021204"/>
             <a:ext cx="523875" cy="276225"/>
           </a:xfrm>
           <a:prstGeom prst="rect">
@@ -5113,7 +5173,7 @@
         </p:nvSpPr>
         <p:spPr>
           <a:xfrm>
-            <a:off x="3657600" y="4754754"/>
+            <a:off x="3626068" y="4754754"/>
             <a:ext cx="523875" cy="276225"/>
           </a:xfrm>
           <a:prstGeom prst="rect">
@@ -5158,6 +5218,36 @@
           </a:p>
         </p:txBody>
       </p:sp>
+      <p:pic>
+        <p:nvPicPr>
+          <p:cNvPr id="2" name="Imagem 1">
+            <a:extLst>
+              <a:ext uri="{FF2B5EF4-FFF2-40B4-BE49-F238E27FC236}">
+                <a16:creationId xmlns:a16="http://schemas.microsoft.com/office/drawing/2014/main" id="{4D7E6C0E-0338-F2C8-CA4A-EBF204A78FC5}"/>
+              </a:ext>
+            </a:extLst>
+          </p:cNvPr>
+          <p:cNvPicPr>
+            <a:picLocks noChangeAspect="1"/>
+          </p:cNvPicPr>
+          <p:nvPr/>
+        </p:nvPicPr>
+        <p:blipFill>
+          <a:blip r:embed="rId5"/>
+          <a:stretch>
+            <a:fillRect/>
+          </a:stretch>
+        </p:blipFill>
+        <p:spPr>
+          <a:xfrm>
+            <a:off x="4695524" y="1554388"/>
+            <a:ext cx="3038530" cy="4271771"/>
+          </a:xfrm>
+          <a:prstGeom prst="rect">
+            <a:avLst/>
+          </a:prstGeom>
+        </p:spPr>
+      </p:pic>
     </p:spTree>
     <p:extLst>
       <p:ext uri="{BB962C8B-B14F-4D97-AF65-F5344CB8AC3E}">
